--- a/Build Instructions/B Leg.x.pptx
+++ b/Build Instructions/B Leg.x.pptx
@@ -123,7 +123,7 @@
   <pc:docChgLst>
     <pc:chgData name="Jordan Henderson" userId="1aefba67a2305a7d" providerId="LiveId" clId="{544928A6-073F-4C18-B400-8A94CC0698F1}"/>
     <pc:docChg chg="undo custSel addSld delSld modSld">
-      <pc:chgData name="Jordan Henderson" userId="1aefba67a2305a7d" providerId="LiveId" clId="{544928A6-073F-4C18-B400-8A94CC0698F1}" dt="2026-10-19T16:35:10.893" v="365" actId="20577"/>
+      <pc:chgData name="Jordan Henderson" userId="1aefba67a2305a7d" providerId="LiveId" clId="{544928A6-073F-4C18-B400-8A94CC0698F1}" dt="2026-10-22T15:46:46.756" v="372" actId="20577"/>
       <pc:docMkLst>
         <pc:docMk/>
       </pc:docMkLst>
@@ -173,13 +173,13 @@
         </pc:spChg>
       </pc:sldChg>
       <pc:sldChg chg="addSp delSp modSp add mod">
-        <pc:chgData name="Jordan Henderson" userId="1aefba67a2305a7d" providerId="LiveId" clId="{544928A6-073F-4C18-B400-8A94CC0698F1}" dt="2026-10-19T16:33:19.543" v="347" actId="313"/>
+        <pc:chgData name="Jordan Henderson" userId="1aefba67a2305a7d" providerId="LiveId" clId="{544928A6-073F-4C18-B400-8A94CC0698F1}" dt="2026-10-22T15:46:46.756" v="372" actId="20577"/>
         <pc:sldMkLst>
           <pc:docMk/>
           <pc:sldMk cId="2394896280" sldId="269"/>
         </pc:sldMkLst>
         <pc:spChg chg="mod">
-          <ac:chgData name="Jordan Henderson" userId="1aefba67a2305a7d" providerId="LiveId" clId="{544928A6-073F-4C18-B400-8A94CC0698F1}" dt="2026-10-19T16:33:19.543" v="347" actId="313"/>
+          <ac:chgData name="Jordan Henderson" userId="1aefba67a2305a7d" providerId="LiveId" clId="{544928A6-073F-4C18-B400-8A94CC0698F1}" dt="2026-10-22T15:46:46.756" v="372" actId="20577"/>
           <ac:spMkLst>
             <pc:docMk/>
             <pc:sldMk cId="2394896280" sldId="269"/>
@@ -339,7 +339,7 @@
           <a:p>
             <a:fld id="{683FA9A8-6EAC-48D3-B691-FF2EF854CE7B}" type="datetimeFigureOut">
               <a:rPr lang="en-US" smtClean="0"/>
-              <a:t>10/19/2026</a:t>
+              <a:t>10/22/2026</a:t>
             </a:fld>
             <a:endParaRPr lang="en-US"/>
           </a:p>
@@ -537,7 +537,7 @@
           <a:p>
             <a:fld id="{683FA9A8-6EAC-48D3-B691-FF2EF854CE7B}" type="datetimeFigureOut">
               <a:rPr lang="en-US" smtClean="0"/>
-              <a:t>10/19/2026</a:t>
+              <a:t>10/22/2026</a:t>
             </a:fld>
             <a:endParaRPr lang="en-US"/>
           </a:p>
@@ -745,7 +745,7 @@
           <a:p>
             <a:fld id="{683FA9A8-6EAC-48D3-B691-FF2EF854CE7B}" type="datetimeFigureOut">
               <a:rPr lang="en-US" smtClean="0"/>
-              <a:t>10/19/2026</a:t>
+              <a:t>10/22/2026</a:t>
             </a:fld>
             <a:endParaRPr lang="en-US"/>
           </a:p>
@@ -943,7 +943,7 @@
           <a:p>
             <a:fld id="{683FA9A8-6EAC-48D3-B691-FF2EF854CE7B}" type="datetimeFigureOut">
               <a:rPr lang="en-US" smtClean="0"/>
-              <a:t>10/19/2026</a:t>
+              <a:t>10/22/2026</a:t>
             </a:fld>
             <a:endParaRPr lang="en-US"/>
           </a:p>
@@ -1218,7 +1218,7 @@
           <a:p>
             <a:fld id="{683FA9A8-6EAC-48D3-B691-FF2EF854CE7B}" type="datetimeFigureOut">
               <a:rPr lang="en-US" smtClean="0"/>
-              <a:t>10/19/2026</a:t>
+              <a:t>10/22/2026</a:t>
             </a:fld>
             <a:endParaRPr lang="en-US"/>
           </a:p>
@@ -1483,7 +1483,7 @@
           <a:p>
             <a:fld id="{683FA9A8-6EAC-48D3-B691-FF2EF854CE7B}" type="datetimeFigureOut">
               <a:rPr lang="en-US" smtClean="0"/>
-              <a:t>10/19/2026</a:t>
+              <a:t>10/22/2026</a:t>
             </a:fld>
             <a:endParaRPr lang="en-US"/>
           </a:p>
@@ -1895,7 +1895,7 @@
           <a:p>
             <a:fld id="{683FA9A8-6EAC-48D3-B691-FF2EF854CE7B}" type="datetimeFigureOut">
               <a:rPr lang="en-US" smtClean="0"/>
-              <a:t>10/19/2026</a:t>
+              <a:t>10/22/2026</a:t>
             </a:fld>
             <a:endParaRPr lang="en-US"/>
           </a:p>
@@ -2036,7 +2036,7 @@
           <a:p>
             <a:fld id="{683FA9A8-6EAC-48D3-B691-FF2EF854CE7B}" type="datetimeFigureOut">
               <a:rPr lang="en-US" smtClean="0"/>
-              <a:t>10/19/2026</a:t>
+              <a:t>10/22/2026</a:t>
             </a:fld>
             <a:endParaRPr lang="en-US"/>
           </a:p>
@@ -2149,7 +2149,7 @@
           <a:p>
             <a:fld id="{683FA9A8-6EAC-48D3-B691-FF2EF854CE7B}" type="datetimeFigureOut">
               <a:rPr lang="en-US" smtClean="0"/>
-              <a:t>10/19/2026</a:t>
+              <a:t>10/22/2026</a:t>
             </a:fld>
             <a:endParaRPr lang="en-US"/>
           </a:p>
@@ -2460,7 +2460,7 @@
           <a:p>
             <a:fld id="{683FA9A8-6EAC-48D3-B691-FF2EF854CE7B}" type="datetimeFigureOut">
               <a:rPr lang="en-US" smtClean="0"/>
-              <a:t>10/19/2026</a:t>
+              <a:t>10/22/2026</a:t>
             </a:fld>
             <a:endParaRPr lang="en-US"/>
           </a:p>
@@ -2748,7 +2748,7 @@
           <a:p>
             <a:fld id="{683FA9A8-6EAC-48D3-B691-FF2EF854CE7B}" type="datetimeFigureOut">
               <a:rPr lang="en-US" smtClean="0"/>
-              <a:t>10/19/2026</a:t>
+              <a:t>10/22/2026</a:t>
             </a:fld>
             <a:endParaRPr lang="en-US"/>
           </a:p>
@@ -2989,7 +2989,7 @@
           <a:p>
             <a:fld id="{683FA9A8-6EAC-48D3-B691-FF2EF854CE7B}" type="datetimeFigureOut">
               <a:rPr lang="en-US" smtClean="0"/>
-              <a:t>10/19/2026</a:t>
+              <a:t>10/22/2026</a:t>
             </a:fld>
             <a:endParaRPr lang="en-US"/>
           </a:p>
@@ -3783,8 +3783,17 @@
               <a:rPr lang="en-US" dirty="0">
                 <a:sym typeface="Wingdings" panose="05000000000000000000" pitchFamily="2" charset="2"/>
               </a:rPr>
-              <a:t>(2) 41”</a:t>
-            </a:r>
+              <a:t>(2) </a:t>
+            </a:r>
+            <a:r>
+              <a:rPr lang="en-US">
+                <a:sym typeface="Wingdings" panose="05000000000000000000" pitchFamily="2" charset="2"/>
+              </a:rPr>
+              <a:t>41”</a:t>
+            </a:r>
+            <a:endParaRPr lang="en-US" dirty="0">
+              <a:sym typeface="Wingdings" panose="05000000000000000000" pitchFamily="2" charset="2"/>
+            </a:endParaRPr>
           </a:p>
         </p:txBody>
       </p:sp>
